--- a/skills/make-clean-pptx/assets/layouts.pptx
+++ b/skills/make-clean-pptx/assets/layouts.pptx
@@ -5921,7 +5921,7 @@
       </p:sp>
       <p:sp>
         <p:nvSpPr>
-          <p:cNvPr id="6" name="Decoration 1">
+          <p:cNvPr id="6" name="decoration#1">
             <a:extLst>
               <a:ext uri="{C183D7F6-B498-43B3-948B-1728B52AA6E4}">
                 <adec:decorative xmlns:adec="http://schemas.microsoft.com/office/drawing/2017/decorative" val="1"/>
@@ -6152,7 +6152,7 @@
       </p:sp>
       <p:sp>
         <p:nvSpPr>
-          <p:cNvPr id="4" name="Decoration 1">
+          <p:cNvPr id="4" name="decoration#1">
             <a:extLst>
               <a:ext uri="{C183D7F6-B498-43B3-948B-1728B52AA6E4}">
                 <adec:decorative xmlns:adec="http://schemas.microsoft.com/office/drawing/2017/decorative" val="1"/>
@@ -6666,7 +6666,7 @@
       </p:sp>
       <p:sp>
         <p:nvSpPr>
-          <p:cNvPr id="7" name="Decoration 1">
+          <p:cNvPr id="7" name="decoration#1">
             <a:extLst>
               <a:ext uri="{C183D7F6-B498-43B3-948B-1728B52AA6E4}">
                 <adec:decorative xmlns:adec="http://schemas.microsoft.com/office/drawing/2017/decorative" val="1"/>
@@ -6909,7 +6909,7 @@
       </p:grpSpPr>
       <p:sp>
         <p:nvSpPr>
-          <p:cNvPr id="2" name="Decoration 1">
+          <p:cNvPr id="2" name="decoration#1">
             <a:extLst>
               <a:ext uri="{C183D7F6-B498-43B3-948B-1728B52AA6E4}">
                 <adec:decorative xmlns:adec="http://schemas.microsoft.com/office/drawing/2017/decorative" val="1"/>
@@ -7323,7 +7323,7 @@
       </p:sp>
       <p:sp>
         <p:nvSpPr>
-          <p:cNvPr id="6" name="Decoration 1">
+          <p:cNvPr id="6" name="decoration#1">
             <a:extLst>
               <a:ext uri="{C183D7F6-B498-43B3-948B-1728B52AA6E4}">
                 <adec:decorative xmlns:adec="http://schemas.microsoft.com/office/drawing/2017/decorative" val="1"/>
@@ -7514,7 +7514,7 @@
       </p:grpSpPr>
       <p:sp>
         <p:nvSpPr>
-          <p:cNvPr id="2" name="Decoration 1">
+          <p:cNvPr id="2" name="decoration#1">
             <a:extLst>
               <a:ext uri="{C183D7F6-B498-43B3-948B-1728B52AA6E4}">
                 <adec:decorative xmlns:adec="http://schemas.microsoft.com/office/drawing/2017/decorative" val="1"/>
@@ -9466,7 +9466,13 @@
       </p:sp>
       <p:sp>
         <p:nvSpPr>
-          <p:cNvPr id="7" name="Side rule"/>
+          <p:cNvPr id="7" name="decoration#1">
+            <a:extLst>
+              <a:ext uri="{C183D7F6-B498-43B3-948B-1728B52AA6E4}">
+                <adec:decorative xmlns:adec="http://schemas.microsoft.com/office/drawing/2017/decorative" val="1"/>
+              </a:ext>
+            </a:extLst>
+          </p:cNvPr>
           <p:cNvSpPr/>
           <p:nvPr/>
         </p:nvSpPr>
@@ -9786,7 +9792,7 @@
       </p:sp>
       <p:sp>
         <p:nvSpPr>
-          <p:cNvPr id="6" name="Decoration 1">
+          <p:cNvPr id="6" name="decoration#1">
             <a:extLst>
               <a:ext uri="{C183D7F6-B498-43B3-948B-1728B52AA6E4}">
                 <adec:decorative xmlns:adec="http://schemas.microsoft.com/office/drawing/2017/decorative" val="1"/>
@@ -9951,7 +9957,7 @@
       </p:sp>
       <p:sp>
         <p:nvSpPr>
-          <p:cNvPr id="9" name="Decoration 2">
+          <p:cNvPr id="9" name="decoration#2">
             <a:extLst>
               <a:ext uri="{C183D7F6-B498-43B3-948B-1728B52AA6E4}">
                 <adec:decorative xmlns:adec="http://schemas.microsoft.com/office/drawing/2017/decorative" val="1"/>
@@ -10325,7 +10331,7 @@
       </p:sp>
       <p:sp>
         <p:nvSpPr>
-          <p:cNvPr id="5" name="Decoration 1">
+          <p:cNvPr id="5" name="decoration#1">
             <a:extLst>
               <a:ext uri="{C183D7F6-B498-43B3-948B-1728B52AA6E4}">
                 <adec:decorative xmlns:adec="http://schemas.microsoft.com/office/drawing/2017/decorative" val="1"/>
@@ -11334,7 +11340,7 @@
       </p:sp>
       <p:sp>
         <p:nvSpPr>
-          <p:cNvPr id="9" name="Decoration 1">
+          <p:cNvPr id="9" name="decoration#1">
             <a:extLst>
               <a:ext uri="{C183D7F6-B498-43B3-948B-1728B52AA6E4}">
                 <adec:decorative xmlns:adec="http://schemas.microsoft.com/office/drawing/2017/decorative" val="1"/>
@@ -11494,7 +11500,7 @@
       </p:sp>
       <p:sp>
         <p:nvSpPr>
-          <p:cNvPr id="13" name="Decoration 2">
+          <p:cNvPr id="13" name="decoration#2">
             <a:extLst>
               <a:ext uri="{C183D7F6-B498-43B3-948B-1728B52AA6E4}">
                 <adec:decorative xmlns:adec="http://schemas.microsoft.com/office/drawing/2017/decorative" val="1"/>
@@ -11654,7 +11660,7 @@
       </p:sp>
       <p:sp>
         <p:nvSpPr>
-          <p:cNvPr id="17" name="Decoration 3">
+          <p:cNvPr id="17" name="decoration#3">
             <a:extLst>
               <a:ext uri="{C183D7F6-B498-43B3-948B-1728B52AA6E4}">
                 <adec:decorative xmlns:adec="http://schemas.microsoft.com/office/drawing/2017/decorative" val="1"/>
@@ -12022,7 +12028,7 @@
       </p:sp>
       <p:sp>
         <p:nvSpPr>
-          <p:cNvPr id="5" name="Decoration 1">
+          <p:cNvPr id="5" name="card#1 &gt; Heading 1">
             <a:extLst>
               <a:ext uri="{C183D7F6-B498-43B3-948B-1728B52AA6E4}">
                 <adec:decorative xmlns:adec="http://schemas.microsoft.com/office/drawing/2017/decorative" val="1"/>
@@ -12132,7 +12138,7 @@
       </p:sp>
       <p:sp>
         <p:nvSpPr>
-          <p:cNvPr id="8" name="Decoration 2">
+          <p:cNvPr id="8" name="card#2 &gt; Heading 2">
             <a:extLst>
               <a:ext uri="{C183D7F6-B498-43B3-948B-1728B52AA6E4}">
                 <adec:decorative xmlns:adec="http://schemas.microsoft.com/office/drawing/2017/decorative" val="1"/>
@@ -12242,7 +12248,7 @@
       </p:sp>
       <p:sp>
         <p:nvSpPr>
-          <p:cNvPr id="11" name="Decoration 3">
+          <p:cNvPr id="11" name="card#3 &gt; Heading 3">
             <a:extLst>
               <a:ext uri="{C183D7F6-B498-43B3-948B-1728B52AA6E4}">
                 <adec:decorative xmlns:adec="http://schemas.microsoft.com/office/drawing/2017/decorative" val="1"/>
@@ -12352,7 +12358,7 @@
       </p:sp>
       <p:sp>
         <p:nvSpPr>
-          <p:cNvPr id="14" name="Decoration 4">
+          <p:cNvPr id="14" name="card#4 &gt; Heading 4">
             <a:extLst>
               <a:ext uri="{C183D7F6-B498-43B3-948B-1728B52AA6E4}">
                 <adec:decorative xmlns:adec="http://schemas.microsoft.com/office/drawing/2017/decorative" val="1"/>
@@ -12712,7 +12718,7 @@
       </p:sp>
       <p:sp>
         <p:nvSpPr>
-          <p:cNvPr id="6" name="Decoration 1">
+          <p:cNvPr id="6" name="panel#1 &gt; Sidebar">
             <a:extLst>
               <a:ext uri="{C183D7F6-B498-43B3-948B-1728B52AA6E4}">
                 <adec:decorative xmlns:adec="http://schemas.microsoft.com/office/drawing/2017/decorative" val="1"/>
@@ -13179,7 +13185,7 @@
       </p:sp>
       <p:sp>
         <p:nvSpPr>
-          <p:cNvPr id="6" name="Decoration 1">
+          <p:cNvPr id="6" name="callout#1 &gt; Takeaway">
             <a:extLst>
               <a:ext uri="{C183D7F6-B498-43B3-948B-1728B52AA6E4}">
                 <adec:decorative xmlns:adec="http://schemas.microsoft.com/office/drawing/2017/decorative" val="1"/>
@@ -13584,7 +13590,7 @@
       </p:sp>
       <p:sp>
         <p:nvSpPr>
-          <p:cNvPr id="7" name="Decoration 1">
+          <p:cNvPr id="7" name="decoration#1">
             <a:extLst>
               <a:ext uri="{C183D7F6-B498-43B3-948B-1728B52AA6E4}">
                 <adec:decorative xmlns:adec="http://schemas.microsoft.com/office/drawing/2017/decorative" val="1"/>
@@ -14225,7 +14231,7 @@
       </p:sp>
       <p:sp>
         <p:nvSpPr>
-          <p:cNvPr id="5" name="Decoration 1">
+          <p:cNvPr id="5" name="callout#1 &gt; Problem">
             <a:extLst>
               <a:ext uri="{C183D7F6-B498-43B3-948B-1728B52AA6E4}">
                 <adec:decorative xmlns:adec="http://schemas.microsoft.com/office/drawing/2017/decorative" val="1"/>
@@ -15040,7 +15046,7 @@
       </p:sp>
       <p:sp>
         <p:nvSpPr>
-          <p:cNvPr id="3" name="Decoration 1">
+          <p:cNvPr id="3" name="callout#1 &gt; Title">
             <a:extLst>
               <a:ext uri="{C183D7F6-B498-43B3-948B-1728B52AA6E4}">
                 <adec:decorative xmlns:adec="http://schemas.microsoft.com/office/drawing/2017/decorative" val="1"/>
@@ -15829,7 +15835,7 @@
       </p:grpSpPr>
       <p:sp>
         <p:nvSpPr>
-          <p:cNvPr id="2" name="Decoration 1">
+          <p:cNvPr id="2" name="decoration#1">
             <a:extLst>
               <a:ext uri="{C183D7F6-B498-43B3-948B-1728B52AA6E4}">
                 <adec:decorative xmlns:adec="http://schemas.microsoft.com/office/drawing/2017/decorative" val="1"/>
@@ -15942,7 +15948,7 @@
       </p:sp>
       <p:sp>
         <p:nvSpPr>
-          <p:cNvPr id="5" name="Decoration 2">
+          <p:cNvPr id="5" name="decoration#2">
             <a:extLst>
               <a:ext uri="{C183D7F6-B498-43B3-948B-1728B52AA6E4}">
                 <adec:decorative xmlns:adec="http://schemas.microsoft.com/office/drawing/2017/decorative" val="1"/>
@@ -17406,7 +17412,7 @@
       </p:sp>
       <p:sp>
         <p:nvSpPr>
-          <p:cNvPr id="8" name="Decoration 1">
+          <p:cNvPr id="8" name="decoration#1">
             <a:extLst>
               <a:ext uri="{C183D7F6-B498-43B3-948B-1728B52AA6E4}">
                 <adec:decorative xmlns:adec="http://schemas.microsoft.com/office/drawing/2017/decorative" val="1"/>
@@ -18607,7 +18613,7 @@
       </p:sp>
       <p:sp>
         <p:nvSpPr>
-          <p:cNvPr id="6" name="Decoration 1">
+          <p:cNvPr id="6" name="decoration#1">
             <a:extLst>
               <a:ext uri="{C183D7F6-B498-43B3-948B-1728B52AA6E4}">
                 <adec:decorative xmlns:adec="http://schemas.microsoft.com/office/drawing/2017/decorative" val="1"/>
@@ -18765,7 +18771,7 @@
       </p:sp>
       <p:sp>
         <p:nvSpPr>
-          <p:cNvPr id="10" name="Decoration 2">
+          <p:cNvPr id="10" name="decoration#2">
             <a:extLst>
               <a:ext uri="{C183D7F6-B498-43B3-948B-1728B52AA6E4}">
                 <adec:decorative xmlns:adec="http://schemas.microsoft.com/office/drawing/2017/decorative" val="1"/>
@@ -19629,7 +19635,7 @@
       </p:sp>
       <p:sp>
         <p:nvSpPr>
-          <p:cNvPr id="6" name="Decoration 1">
+          <p:cNvPr id="6" name="decoration#1">
             <a:extLst>
               <a:ext uri="{C183D7F6-B498-43B3-948B-1728B52AA6E4}">
                 <adec:decorative xmlns:adec="http://schemas.microsoft.com/office/drawing/2017/decorative" val="1"/>
@@ -19787,7 +19793,7 @@
       </p:sp>
       <p:sp>
         <p:nvSpPr>
-          <p:cNvPr id="10" name="Decoration 2">
+          <p:cNvPr id="10" name="decoration#2">
             <a:extLst>
               <a:ext uri="{C183D7F6-B498-43B3-948B-1728B52AA6E4}">
                 <adec:decorative xmlns:adec="http://schemas.microsoft.com/office/drawing/2017/decorative" val="1"/>
@@ -19945,7 +19951,7 @@
       </p:sp>
       <p:sp>
         <p:nvSpPr>
-          <p:cNvPr id="14" name="Decoration 3">
+          <p:cNvPr id="14" name="decoration#3">
             <a:extLst>
               <a:ext uri="{C183D7F6-B498-43B3-948B-1728B52AA6E4}">
                 <adec:decorative xmlns:adec="http://schemas.microsoft.com/office/drawing/2017/decorative" val="1"/>
@@ -20353,7 +20359,7 @@
       </p:sp>
       <p:sp>
         <p:nvSpPr>
-          <p:cNvPr id="6" name="Decoration 1">
+          <p:cNvPr id="6" name="keyfigure#1 &gt; KPI 1 value">
             <a:extLst>
               <a:ext uri="{C183D7F6-B498-43B3-948B-1728B52AA6E4}">
                 <adec:decorative xmlns:adec="http://schemas.microsoft.com/office/drawing/2017/decorative" val="1"/>
@@ -20508,7 +20514,7 @@
       </p:sp>
       <p:sp>
         <p:nvSpPr>
-          <p:cNvPr id="10" name="Decoration 2">
+          <p:cNvPr id="10" name="keyfigure#2 &gt; KPI 2 value">
             <a:extLst>
               <a:ext uri="{C183D7F6-B498-43B3-948B-1728B52AA6E4}">
                 <adec:decorative xmlns:adec="http://schemas.microsoft.com/office/drawing/2017/decorative" val="1"/>
@@ -20663,7 +20669,7 @@
       </p:sp>
       <p:sp>
         <p:nvSpPr>
-          <p:cNvPr id="14" name="Decoration 3">
+          <p:cNvPr id="14" name="keyfigure#3 &gt; KPI 3 value">
             <a:extLst>
               <a:ext uri="{C183D7F6-B498-43B3-948B-1728B52AA6E4}">
                 <adec:decorative xmlns:adec="http://schemas.microsoft.com/office/drawing/2017/decorative" val="1"/>
@@ -20818,7 +20824,7 @@
       </p:sp>
       <p:sp>
         <p:nvSpPr>
-          <p:cNvPr id="18" name="Decoration 4">
+          <p:cNvPr id="18" name="keyfigure#4 &gt; KPI 4 value">
             <a:extLst>
               <a:ext uri="{C183D7F6-B498-43B3-948B-1728B52AA6E4}">
                 <adec:decorative xmlns:adec="http://schemas.microsoft.com/office/drawing/2017/decorative" val="1"/>
@@ -21181,7 +21187,7 @@
       </p:sp>
       <p:sp>
         <p:nvSpPr>
-          <p:cNvPr id="5" name="Decoration 1">
+          <p:cNvPr id="5" name="decoration#1">
             <a:extLst>
               <a:ext uri="{C183D7F6-B498-43B3-948B-1728B52AA6E4}">
                 <adec:decorative xmlns:adec="http://schemas.microsoft.com/office/drawing/2017/decorative" val="1"/>
@@ -21341,7 +21347,7 @@
       </p:sp>
       <p:sp>
         <p:nvSpPr>
-          <p:cNvPr id="9" name="Decoration 2">
+          <p:cNvPr id="9" name="decoration#2">
             <a:extLst>
               <a:ext uri="{C183D7F6-B498-43B3-948B-1728B52AA6E4}">
                 <adec:decorative xmlns:adec="http://schemas.microsoft.com/office/drawing/2017/decorative" val="1"/>
@@ -21501,7 +21507,7 @@
       </p:sp>
       <p:sp>
         <p:nvSpPr>
-          <p:cNvPr id="13" name="Decoration 3">
+          <p:cNvPr id="13" name="decoration#3">
             <a:extLst>
               <a:ext uri="{C183D7F6-B498-43B3-948B-1728B52AA6E4}">
                 <adec:decorative xmlns:adec="http://schemas.microsoft.com/office/drawing/2017/decorative" val="1"/>
@@ -21661,7 +21667,7 @@
       </p:sp>
       <p:sp>
         <p:nvSpPr>
-          <p:cNvPr id="17" name="Decoration 4">
+          <p:cNvPr id="17" name="decoration#4">
             <a:extLst>
               <a:ext uri="{C183D7F6-B498-43B3-948B-1728B52AA6E4}">
                 <adec:decorative xmlns:adec="http://schemas.microsoft.com/office/drawing/2017/decorative" val="1"/>
@@ -21821,7 +21827,7 @@
       </p:sp>
       <p:sp>
         <p:nvSpPr>
-          <p:cNvPr id="21" name="Decoration 5">
+          <p:cNvPr id="21" name="decoration#5">
             <a:extLst>
               <a:ext uri="{C183D7F6-B498-43B3-948B-1728B52AA6E4}">
                 <adec:decorative xmlns:adec="http://schemas.microsoft.com/office/drawing/2017/decorative" val="1"/>
@@ -21981,7 +21987,7 @@
       </p:sp>
       <p:sp>
         <p:nvSpPr>
-          <p:cNvPr id="25" name="Decoration 6">
+          <p:cNvPr id="25" name="decoration#6">
             <a:extLst>
               <a:ext uri="{C183D7F6-B498-43B3-948B-1728B52AA6E4}">
                 <adec:decorative xmlns:adec="http://schemas.microsoft.com/office/drawing/2017/decorative" val="1"/>
@@ -22481,7 +22487,7 @@
       </p:grpSpPr>
       <p:sp>
         <p:nvSpPr>
-          <p:cNvPr id="2" name="Decoration 1">
+          <p:cNvPr id="2" name="panel#1 &gt; Number">
             <a:extLst>
               <a:ext uri="{C183D7F6-B498-43B3-948B-1728B52AA6E4}">
                 <adec:decorative xmlns:adec="http://schemas.microsoft.com/office/drawing/2017/decorative" val="1"/>
@@ -27288,7 +27294,7 @@
       </p:sp>
       <p:sp>
         <p:nvSpPr>
-          <p:cNvPr id="5" name="Decoration 1">
+          <p:cNvPr id="5" name="card#1 &gt; Option 1 name">
             <a:extLst>
               <a:ext uri="{C183D7F6-B498-43B3-948B-1728B52AA6E4}">
                 <adec:decorative xmlns:adec="http://schemas.microsoft.com/office/drawing/2017/decorative" val="1"/>
@@ -27499,7 +27505,7 @@
       </p:sp>
       <p:sp>
         <p:nvSpPr>
-          <p:cNvPr id="9" name="Decoration 2">
+          <p:cNvPr id="9" name="decoration#1">
             <a:extLst>
               <a:ext uri="{C183D7F6-B498-43B3-948B-1728B52AA6E4}">
                 <adec:decorative xmlns:adec="http://schemas.microsoft.com/office/drawing/2017/decorative" val="1"/>
@@ -27572,7 +27578,7 @@
       </p:sp>
       <p:sp>
         <p:nvSpPr>
-          <p:cNvPr id="11" name="Decoration 3">
+          <p:cNvPr id="11" name="card#2 &gt; Option 2 name">
             <a:extLst>
               <a:ext uri="{C183D7F6-B498-43B3-948B-1728B52AA6E4}">
                 <adec:decorative xmlns:adec="http://schemas.microsoft.com/office/drawing/2017/decorative" val="1"/>
@@ -27783,7 +27789,7 @@
       </p:sp>
       <p:sp>
         <p:nvSpPr>
-          <p:cNvPr id="15" name="Decoration 4">
+          <p:cNvPr id="15" name="decoration#2">
             <a:extLst>
               <a:ext uri="{C183D7F6-B498-43B3-948B-1728B52AA6E4}">
                 <adec:decorative xmlns:adec="http://schemas.microsoft.com/office/drawing/2017/decorative" val="1"/>
@@ -28064,7 +28070,7 @@
       </p:sp>
       <p:sp>
         <p:nvSpPr>
-          <p:cNvPr id="5" name="Decoration 1">
+          <p:cNvPr id="5" name="card#1 &gt; Option 1 name">
             <a:extLst>
               <a:ext uri="{C183D7F6-B498-43B3-948B-1728B52AA6E4}">
                 <adec:decorative xmlns:adec="http://schemas.microsoft.com/office/drawing/2017/decorative" val="1"/>
@@ -28268,7 +28274,7 @@
       </p:sp>
       <p:sp>
         <p:nvSpPr>
-          <p:cNvPr id="9" name="Decoration 2">
+          <p:cNvPr id="9" name="decoration#1">
             <a:extLst>
               <a:ext uri="{C183D7F6-B498-43B3-948B-1728B52AA6E4}">
                 <adec:decorative xmlns:adec="http://schemas.microsoft.com/office/drawing/2017/decorative" val="1"/>
@@ -28339,7 +28345,7 @@
       </p:sp>
       <p:sp>
         <p:nvSpPr>
-          <p:cNvPr id="11" name="Decoration 3">
+          <p:cNvPr id="11" name="card#2 &gt; Option 2 name">
             <a:extLst>
               <a:ext uri="{C183D7F6-B498-43B3-948B-1728B52AA6E4}">
                 <adec:decorative xmlns:adec="http://schemas.microsoft.com/office/drawing/2017/decorative" val="1"/>
@@ -28550,7 +28556,7 @@
       </p:sp>
       <p:sp>
         <p:nvSpPr>
-          <p:cNvPr id="15" name="Decoration 4">
+          <p:cNvPr id="15" name="decoration#2">
             <a:extLst>
               <a:ext uri="{C183D7F6-B498-43B3-948B-1728B52AA6E4}">
                 <adec:decorative xmlns:adec="http://schemas.microsoft.com/office/drawing/2017/decorative" val="1"/>
@@ -28831,7 +28837,7 @@
       </p:sp>
       <p:sp>
         <p:nvSpPr>
-          <p:cNvPr id="5" name="Decoration 1">
+          <p:cNvPr id="5" name="card#1 &gt; Option 1 name">
             <a:extLst>
               <a:ext uri="{C183D7F6-B498-43B3-948B-1728B52AA6E4}">
                 <adec:decorative xmlns:adec="http://schemas.microsoft.com/office/drawing/2017/decorative" val="1"/>
@@ -29042,7 +29048,7 @@
       </p:sp>
       <p:sp>
         <p:nvSpPr>
-          <p:cNvPr id="9" name="Decoration 2">
+          <p:cNvPr id="9" name="decoration#1">
             <a:extLst>
               <a:ext uri="{C183D7F6-B498-43B3-948B-1728B52AA6E4}">
                 <adec:decorative xmlns:adec="http://schemas.microsoft.com/office/drawing/2017/decorative" val="1"/>
@@ -29115,7 +29121,7 @@
       </p:sp>
       <p:sp>
         <p:nvSpPr>
-          <p:cNvPr id="11" name="Decoration 3">
+          <p:cNvPr id="11" name="card#2 &gt; Option 2 name">
             <a:extLst>
               <a:ext uri="{C183D7F6-B498-43B3-948B-1728B52AA6E4}">
                 <adec:decorative xmlns:adec="http://schemas.microsoft.com/office/drawing/2017/decorative" val="1"/>
@@ -29326,7 +29332,7 @@
       </p:sp>
       <p:sp>
         <p:nvSpPr>
-          <p:cNvPr id="15" name="Decoration 4">
+          <p:cNvPr id="15" name="decoration#2">
             <a:extLst>
               <a:ext uri="{C183D7F6-B498-43B3-948B-1728B52AA6E4}">
                 <adec:decorative xmlns:adec="http://schemas.microsoft.com/office/drawing/2017/decorative" val="1"/>
@@ -29399,7 +29405,7 @@
       </p:sp>
       <p:sp>
         <p:nvSpPr>
-          <p:cNvPr id="17" name="Decoration 5">
+          <p:cNvPr id="17" name="card#3 &gt; Option 3 name">
             <a:extLst>
               <a:ext uri="{C183D7F6-B498-43B3-948B-1728B52AA6E4}">
                 <adec:decorative xmlns:adec="http://schemas.microsoft.com/office/drawing/2017/decorative" val="1"/>
@@ -29610,7 +29616,7 @@
       </p:sp>
       <p:sp>
         <p:nvSpPr>
-          <p:cNvPr id="21" name="Decoration 6">
+          <p:cNvPr id="21" name="decoration#3">
             <a:extLst>
               <a:ext uri="{C183D7F6-B498-43B3-948B-1728B52AA6E4}">
                 <adec:decorative xmlns:adec="http://schemas.microsoft.com/office/drawing/2017/decorative" val="1"/>
@@ -29891,7 +29897,7 @@
       </p:sp>
       <p:sp>
         <p:nvSpPr>
-          <p:cNvPr id="5" name="Decoration 1">
+          <p:cNvPr id="5" name="card#1 &gt; Left points">
             <a:extLst>
               <a:ext uri="{C183D7F6-B498-43B3-948B-1728B52AA6E4}">
                 <adec:decorative xmlns:adec="http://schemas.microsoft.com/office/drawing/2017/decorative" val="1"/>
@@ -30056,7 +30062,7 @@
       </p:sp>
       <p:sp>
         <p:nvSpPr>
-          <p:cNvPr id="8" name="Decoration 2">
+          <p:cNvPr id="8" name="decoration#1">
             <a:extLst>
               <a:ext uri="{C183D7F6-B498-43B3-948B-1728B52AA6E4}">
                 <adec:decorative xmlns:adec="http://schemas.microsoft.com/office/drawing/2017/decorative" val="1"/>
@@ -30086,7 +30092,7 @@
       </p:sp>
       <p:sp>
         <p:nvSpPr>
-          <p:cNvPr id="9" name="Decoration 3">
+          <p:cNvPr id="9" name="card#2 &gt; Right points">
             <a:extLst>
               <a:ext uri="{C183D7F6-B498-43B3-948B-1728B52AA6E4}">
                 <adec:decorative xmlns:adec="http://schemas.microsoft.com/office/drawing/2017/decorative" val="1"/>
@@ -30456,7 +30462,7 @@
       </p:sp>
       <p:sp>
         <p:nvSpPr>
-          <p:cNvPr id="5" name="Decoration 1">
+          <p:cNvPr id="5" name="decoration#1">
             <a:extLst>
               <a:ext uri="{C183D7F6-B498-43B3-948B-1728B52AA6E4}">
                 <adec:decorative xmlns:adec="http://schemas.microsoft.com/office/drawing/2017/decorative" val="1"/>
@@ -30926,7 +30932,7 @@
       </p:sp>
       <p:sp>
         <p:nvSpPr>
-          <p:cNvPr id="17" name="Decoration 2">
+          <p:cNvPr id="17" name="callout#1 &gt; Decision">
             <a:extLst>
               <a:ext uri="{C183D7F6-B498-43B3-948B-1728B52AA6E4}">
                 <adec:decorative xmlns:adec="http://schemas.microsoft.com/office/drawing/2017/decorative" val="1"/>
@@ -31286,7 +31292,7 @@
       </p:sp>
       <p:sp>
         <p:nvSpPr>
-          <p:cNvPr id="6" name="Decoration 1">
+          <p:cNvPr id="6" name="decoration#1">
             <a:extLst>
               <a:ext uri="{C183D7F6-B498-43B3-948B-1728B52AA6E4}">
                 <adec:decorative xmlns:adec="http://schemas.microsoft.com/office/drawing/2017/decorative" val="1"/>
@@ -32283,7 +32289,7 @@
       </p:sp>
       <p:sp>
         <p:nvSpPr>
-          <p:cNvPr id="4" name="Decoration 1">
+          <p:cNvPr id="4" name="decoration#1">
             <a:extLst>
               <a:ext uri="{C183D7F6-B498-43B3-948B-1728B52AA6E4}">
                 <adec:decorative xmlns:adec="http://schemas.microsoft.com/office/drawing/2017/decorative" val="1"/>
@@ -32820,7 +32826,7 @@
       </p:grpSpPr>
       <p:sp>
         <p:nvSpPr>
-          <p:cNvPr id="2" name="Decoration 1">
+          <p:cNvPr id="2" name="panel#1 &gt; Title">
             <a:extLst>
               <a:ext uri="{C183D7F6-B498-43B3-948B-1728B52AA6E4}">
                 <adec:decorative xmlns:adec="http://schemas.microsoft.com/office/drawing/2017/decorative" val="1"/>
@@ -33216,7 +33222,7 @@
       </p:sp>
       <p:sp>
         <p:nvSpPr>
-          <p:cNvPr id="5" name="Decoration 1">
+          <p:cNvPr id="5" name="keyfigure#1 &gt; Main value">
             <a:extLst>
               <a:ext uri="{C183D7F6-B498-43B3-948B-1728B52AA6E4}">
                 <adec:decorative xmlns:adec="http://schemas.microsoft.com/office/drawing/2017/decorative" val="1"/>
@@ -33368,7 +33374,7 @@
       </p:sp>
       <p:sp>
         <p:nvSpPr>
-          <p:cNvPr id="9" name="Decoration 2">
+          <p:cNvPr id="9" name="card#1 &gt; Tile 1 heading">
             <a:extLst>
               <a:ext uri="{C183D7F6-B498-43B3-948B-1728B52AA6E4}">
                 <adec:decorative xmlns:adec="http://schemas.microsoft.com/office/drawing/2017/decorative" val="1"/>
@@ -33478,7 +33484,7 @@
       </p:sp>
       <p:sp>
         <p:nvSpPr>
-          <p:cNvPr id="12" name="Decoration 3">
+          <p:cNvPr id="12" name="card#2 &gt; Tile 2 heading">
             <a:extLst>
               <a:ext uri="{C183D7F6-B498-43B3-948B-1728B52AA6E4}">
                 <adec:decorative xmlns:adec="http://schemas.microsoft.com/office/drawing/2017/decorative" val="1"/>
@@ -33588,7 +33594,7 @@
       </p:sp>
       <p:sp>
         <p:nvSpPr>
-          <p:cNvPr id="15" name="Decoration 4">
+          <p:cNvPr id="15" name="card#3 &gt; Tile 3 heading">
             <a:extLst>
               <a:ext uri="{C183D7F6-B498-43B3-948B-1728B52AA6E4}">
                 <adec:decorative xmlns:adec="http://schemas.microsoft.com/office/drawing/2017/decorative" val="1"/>
@@ -33906,7 +33912,7 @@
       </p:sp>
       <p:sp>
         <p:nvSpPr>
-          <p:cNvPr id="5" name="Decoration 1">
+          <p:cNvPr id="5" name="panel#1 &gt; Band 1 heading">
             <a:extLst>
               <a:ext uri="{C183D7F6-B498-43B3-948B-1728B52AA6E4}">
                 <adec:decorative xmlns:adec="http://schemas.microsoft.com/office/drawing/2017/decorative" val="1"/>
@@ -34184,7 +34190,7 @@
       </p:sp>
       <p:sp>
         <p:nvSpPr>
-          <p:cNvPr id="12" name="Decoration 2">
+          <p:cNvPr id="12" name="panel#2 &gt; Band 3 heading">
             <a:extLst>
               <a:ext uri="{C183D7F6-B498-43B3-948B-1728B52AA6E4}">
                 <adec:decorative xmlns:adec="http://schemas.microsoft.com/office/drawing/2017/decorative" val="1"/>
@@ -34544,7 +34550,7 @@
       </p:sp>
       <p:sp>
         <p:nvSpPr>
-          <p:cNvPr id="5" name="Decoration 1">
+          <p:cNvPr id="5" name="decoration#1">
             <a:extLst>
               <a:ext uri="{C183D7F6-B498-43B3-948B-1728B52AA6E4}">
                 <adec:decorative xmlns:adec="http://schemas.microsoft.com/office/drawing/2017/decorative" val="1"/>
@@ -35279,7 +35285,7 @@
       </p:grpSpPr>
       <p:sp>
         <p:nvSpPr>
-          <p:cNvPr id="2" name="Decoration 1">
+          <p:cNvPr id="2" name="panel#1 &gt; Title">
             <a:extLst>
               <a:ext uri="{C183D7F6-B498-43B3-948B-1728B52AA6E4}">
                 <adec:decorative xmlns:adec="http://schemas.microsoft.com/office/drawing/2017/decorative" val="1"/>
@@ -35431,7 +35437,7 @@
       </p:sp>
       <p:sp>
         <p:nvSpPr>
-          <p:cNvPr id="6" name="Decoration 2">
+          <p:cNvPr id="6" name="decoration#1">
             <a:extLst>
               <a:ext uri="{C183D7F6-B498-43B3-948B-1728B52AA6E4}">
                 <adec:decorative xmlns:adec="http://schemas.microsoft.com/office/drawing/2017/decorative" val="1"/>
@@ -35544,7 +35550,7 @@
       </p:sp>
       <p:sp>
         <p:nvSpPr>
-          <p:cNvPr id="9" name="Decoration 3">
+          <p:cNvPr id="9" name="decoration#2">
             <a:extLst>
               <a:ext uri="{C183D7F6-B498-43B3-948B-1728B52AA6E4}">
                 <adec:decorative xmlns:adec="http://schemas.microsoft.com/office/drawing/2017/decorative" val="1"/>
@@ -35856,7 +35862,7 @@
       </p:sp>
       <p:sp>
         <p:nvSpPr>
-          <p:cNvPr id="5" name="Decoration 1">
+          <p:cNvPr id="5" name="decoration#1">
             <a:extLst>
               <a:ext uri="{C183D7F6-B498-43B3-948B-1728B52AA6E4}">
                 <adec:decorative xmlns:adec="http://schemas.microsoft.com/office/drawing/2017/decorative" val="1"/>
@@ -38110,7 +38116,7 @@
       </p:sp>
       <p:sp>
         <p:nvSpPr>
-          <p:cNvPr id="6" name="Decoration 1">
+          <p:cNvPr id="6" name="decoration#1">
             <a:extLst>
               <a:ext uri="{C183D7F6-B498-43B3-948B-1728B52AA6E4}">
                 <adec:decorative xmlns:adec="http://schemas.microsoft.com/office/drawing/2017/decorative" val="1"/>
@@ -39189,7 +39195,7 @@
       </p:sp>
       <p:sp>
         <p:nvSpPr>
-          <p:cNvPr id="3" name="Decoration 1">
+          <p:cNvPr id="3" name="decoration#1">
             <a:extLst>
               <a:ext uri="{C183D7F6-B498-43B3-948B-1728B52AA6E4}">
                 <adec:decorative xmlns:adec="http://schemas.microsoft.com/office/drawing/2017/decorative" val="1"/>
@@ -39392,7 +39398,7 @@
       </p:sp>
       <p:sp>
         <p:nvSpPr>
-          <p:cNvPr id="8" name="Decoration 2">
+          <p:cNvPr id="8" name="decoration#2">
             <a:extLst>
               <a:ext uri="{C183D7F6-B498-43B3-948B-1728B52AA6E4}">
                 <adec:decorative xmlns:adec="http://schemas.microsoft.com/office/drawing/2017/decorative" val="1"/>

--- a/skills/make-clean-pptx/assets/layouts.pptx
+++ b/skills/make-clean-pptx/assets/layouts.pptx
@@ -10442,6 +10442,26 @@
           </a:p>
         </p:txBody>
       </p:sp>
+      <p:sp>
+        <p:nvSpPr>
+          <p:cNvPr id="8" name="Logo"/>
+          <p:cNvSpPr/>
+          <p:nvPr/>
+        </p:nvSpPr>
+        <p:spPr>
+          <a:xfrm>
+            <a:off x="548640" y="457200"/>
+            <a:ext cx="1463040" cy="457200"/>
+          </a:xfrm>
+          <a:prstGeom prst="rect">
+            <a:avLst/>
+          </a:prstGeom>
+          <a:solidFill>
+            <a:schemeClr val="accent6"/>
+          </a:solidFill>
+          <a:ln/>
+        </p:spPr>
+      </p:sp>
     </p:spTree>
   </p:cSld>
   <p:clrMapOvr>
@@ -16020,6 +16040,26 @@
           </a:p>
         </p:txBody>
       </p:sp>
+      <p:sp>
+        <p:nvSpPr>
+          <p:cNvPr id="7" name="Logo"/>
+          <p:cNvSpPr/>
+          <p:nvPr/>
+        </p:nvSpPr>
+        <p:spPr>
+          <a:xfrm>
+            <a:off x="5364328" y="457200"/>
+            <a:ext cx="1463040" cy="457200"/>
+          </a:xfrm>
+          <a:prstGeom prst="rect">
+            <a:avLst/>
+          </a:prstGeom>
+          <a:solidFill>
+            <a:schemeClr val="accent6"/>
+          </a:solidFill>
+          <a:ln/>
+        </p:spPr>
+      </p:sp>
     </p:spTree>
   </p:cSld>
   <p:clrMapOvr>
@@ -22459,6 +22499,26 @@
             <a:endParaRPr lang="en-US" sz="1000" dirty="0"/>
           </a:p>
         </p:txBody>
+      </p:sp>
+      <p:sp>
+        <p:nvSpPr>
+          <p:cNvPr id="8" name="Logo"/>
+          <p:cNvSpPr/>
+          <p:nvPr/>
+        </p:nvSpPr>
+        <p:spPr>
+          <a:xfrm>
+            <a:off x="548640" y="457200"/>
+            <a:ext cx="1463040" cy="457200"/>
+          </a:xfrm>
+          <a:prstGeom prst="rect">
+            <a:avLst/>
+          </a:prstGeom>
+          <a:solidFill>
+            <a:schemeClr val="accent6"/>
+          </a:solidFill>
+          <a:ln/>
+        </p:spPr>
       </p:sp>
     </p:spTree>
   </p:cSld>
@@ -32750,6 +32810,26 @@
       </p:sp>
       <p:sp>
         <p:nvSpPr>
+          <p:cNvPr id="15" name="Logo"/>
+          <p:cNvSpPr/>
+          <p:nvPr/>
+        </p:nvSpPr>
+        <p:spPr>
+          <a:xfrm>
+            <a:off x="548640" y="457200"/>
+            <a:ext cx="1463040" cy="457200"/>
+          </a:xfrm>
+          <a:prstGeom prst="rect">
+            <a:avLst/>
+          </a:prstGeom>
+          <a:solidFill>
+            <a:schemeClr val="accent6"/>
+          </a:solidFill>
+          <a:ln/>
+        </p:spPr>
+      </p:sp>
+      <p:sp>
+        <p:nvSpPr>
           <p:cNvPr id="25" name="Slide Number Placeholder 0"/>
           <p:cNvSpPr>
             <a:spLocks noGrp="1"/>
@@ -33062,6 +33142,26 @@
             <a:endParaRPr lang="en-US" sz="1000" dirty="0"/>
           </a:p>
         </p:txBody>
+      </p:sp>
+      <p:sp>
+        <p:nvSpPr>
+          <p:cNvPr id="8" name="Logo"/>
+          <p:cNvSpPr/>
+          <p:nvPr/>
+        </p:nvSpPr>
+        <p:spPr>
+          <a:xfrm>
+            <a:off x="10180015" y="457200"/>
+            <a:ext cx="1463040" cy="457200"/>
+          </a:xfrm>
+          <a:prstGeom prst="rect">
+            <a:avLst/>
+          </a:prstGeom>
+          <a:solidFill>
+            <a:schemeClr val="accent6"/>
+          </a:solidFill>
+          <a:ln/>
+        </p:spPr>
       </p:sp>
     </p:spTree>
   </p:cSld>
